--- a/public/videos/repositories/rc-course-finder/rc-course-finder-tech-preview.pptx
+++ b/public/videos/repositories/rc-course-finder/rc-course-finder-tech-preview.pptx
@@ -134,7 +134,7 @@
           <p:cNvPr id="2" name="タイトル 1">
             <a:extLst>
               <a:ext uri="{FF2B5EF4-FFF2-40B4-BE49-F238E27FC236}">
-                <a16:creationId xmlns:a16="http://schemas.microsoft.com/office/drawing/2014/main" id="{95B52192-49E9-8AB6-863E-1E325CBFEE79}"/>
+                <a16:creationId xmlns:a16="http://schemas.microsoft.com/office/drawing/2014/main" id="{71643098-E218-2D64-8B2F-D0F8724EBFE7}"/>
               </a:ext>
             </a:extLst>
           </p:cNvPr>
@@ -171,7 +171,7 @@
           <p:cNvPr id="3" name="字幕 2">
             <a:extLst>
               <a:ext uri="{FF2B5EF4-FFF2-40B4-BE49-F238E27FC236}">
-                <a16:creationId xmlns:a16="http://schemas.microsoft.com/office/drawing/2014/main" id="{5B1EBB30-ABEB-A578-0066-20898D607467}"/>
+                <a16:creationId xmlns:a16="http://schemas.microsoft.com/office/drawing/2014/main" id="{1E856EF1-5D51-30C3-6A4A-38F81080AADD}"/>
               </a:ext>
             </a:extLst>
           </p:cNvPr>
@@ -241,7 +241,7 @@
           <p:cNvPr id="4" name="日付プレースホルダー 3">
             <a:extLst>
               <a:ext uri="{FF2B5EF4-FFF2-40B4-BE49-F238E27FC236}">
-                <a16:creationId xmlns:a16="http://schemas.microsoft.com/office/drawing/2014/main" id="{E11B2598-C777-8C74-7215-47CE43C85A3F}"/>
+                <a16:creationId xmlns:a16="http://schemas.microsoft.com/office/drawing/2014/main" id="{9DB6275A-F260-2CFA-FA96-833CEF817105}"/>
               </a:ext>
             </a:extLst>
           </p:cNvPr>
@@ -257,7 +257,7 @@
           <a:bodyPr/>
           <a:lstStyle/>
           <a:p>
-            <a:fld id="{C38B9B03-2810-4D15-92C0-C62052C6A8A4}" type="datetimeFigureOut">
+            <a:fld id="{8FE2805E-33CF-42E9-A724-30A81878CA04}" type="datetimeFigureOut">
               <a:rPr kumimoji="1" lang="ja-JP" altLang="en-US" smtClean="0"/>
               <a:t>2026/7/30</a:t>
             </a:fld>
@@ -270,7 +270,7 @@
           <p:cNvPr id="5" name="フッター プレースホルダー 4">
             <a:extLst>
               <a:ext uri="{FF2B5EF4-FFF2-40B4-BE49-F238E27FC236}">
-                <a16:creationId xmlns:a16="http://schemas.microsoft.com/office/drawing/2014/main" id="{9524CAB8-594B-A646-988B-D0402515B003}"/>
+                <a16:creationId xmlns:a16="http://schemas.microsoft.com/office/drawing/2014/main" id="{33B7B086-73B1-3133-7105-038AADAD59E2}"/>
               </a:ext>
             </a:extLst>
           </p:cNvPr>
@@ -295,7 +295,7 @@
           <p:cNvPr id="6" name="スライド番号プレースホルダー 5">
             <a:extLst>
               <a:ext uri="{FF2B5EF4-FFF2-40B4-BE49-F238E27FC236}">
-                <a16:creationId xmlns:a16="http://schemas.microsoft.com/office/drawing/2014/main" id="{C965F863-227C-BC12-1432-2C201259CD29}"/>
+                <a16:creationId xmlns:a16="http://schemas.microsoft.com/office/drawing/2014/main" id="{9279FFD9-A070-D6DC-014F-7F000D5B7C25}"/>
               </a:ext>
             </a:extLst>
           </p:cNvPr>
@@ -311,7 +311,7 @@
           <a:bodyPr/>
           <a:lstStyle/>
           <a:p>
-            <a:fld id="{3AAC49E2-200C-4904-81BD-190727DA8FD6}" type="slidenum">
+            <a:fld id="{8084D719-0CFF-4FE4-BEE4-023CBCCB8895}" type="slidenum">
               <a:rPr kumimoji="1" lang="ja-JP" altLang="en-US" smtClean="0"/>
               <a:t>‹#›</a:t>
             </a:fld>
@@ -322,7 +322,7 @@
     </p:spTree>
     <p:extLst>
       <p:ext uri="{BB962C8B-B14F-4D97-AF65-F5344CB8AC3E}">
-        <p14:creationId xmlns:p14="http://schemas.microsoft.com/office/powerpoint/2010/main" val="1665225848"/>
+        <p14:creationId xmlns:p14="http://schemas.microsoft.com/office/powerpoint/2010/main" val="3334023307"/>
       </p:ext>
     </p:extLst>
   </p:cSld>
@@ -354,7 +354,7 @@
           <p:cNvPr id="2" name="タイトル 1">
             <a:extLst>
               <a:ext uri="{FF2B5EF4-FFF2-40B4-BE49-F238E27FC236}">
-                <a16:creationId xmlns:a16="http://schemas.microsoft.com/office/drawing/2014/main" id="{3B4F5FC6-DED8-995E-1835-AA53F25BC494}"/>
+                <a16:creationId xmlns:a16="http://schemas.microsoft.com/office/drawing/2014/main" id="{9A12559B-E3C7-48EC-5F02-98BC7ADB41DA}"/>
               </a:ext>
             </a:extLst>
           </p:cNvPr>
@@ -382,7 +382,7 @@
           <p:cNvPr id="3" name="縦書きテキスト プレースホルダー 2">
             <a:extLst>
               <a:ext uri="{FF2B5EF4-FFF2-40B4-BE49-F238E27FC236}">
-                <a16:creationId xmlns:a16="http://schemas.microsoft.com/office/drawing/2014/main" id="{85F37D1E-5FEF-35EC-4467-34EDD57515A0}"/>
+                <a16:creationId xmlns:a16="http://schemas.microsoft.com/office/drawing/2014/main" id="{693981EA-8A71-AA75-260E-673611FE4BC6}"/>
               </a:ext>
             </a:extLst>
           </p:cNvPr>
@@ -471,7 +471,7 @@
           <p:cNvPr id="4" name="日付プレースホルダー 3">
             <a:extLst>
               <a:ext uri="{FF2B5EF4-FFF2-40B4-BE49-F238E27FC236}">
-                <a16:creationId xmlns:a16="http://schemas.microsoft.com/office/drawing/2014/main" id="{4C3623AD-16B3-E71D-5678-2C80DAE0D090}"/>
+                <a16:creationId xmlns:a16="http://schemas.microsoft.com/office/drawing/2014/main" id="{7D9DB188-031E-FEDD-FBA1-4CB87B1B0E37}"/>
               </a:ext>
             </a:extLst>
           </p:cNvPr>
@@ -487,7 +487,7 @@
           <a:bodyPr/>
           <a:lstStyle/>
           <a:p>
-            <a:fld id="{C38B9B03-2810-4D15-92C0-C62052C6A8A4}" type="datetimeFigureOut">
+            <a:fld id="{8FE2805E-33CF-42E9-A724-30A81878CA04}" type="datetimeFigureOut">
               <a:rPr kumimoji="1" lang="ja-JP" altLang="en-US" smtClean="0"/>
               <a:t>2026/7/30</a:t>
             </a:fld>
@@ -500,7 +500,7 @@
           <p:cNvPr id="5" name="フッター プレースホルダー 4">
             <a:extLst>
               <a:ext uri="{FF2B5EF4-FFF2-40B4-BE49-F238E27FC236}">
-                <a16:creationId xmlns:a16="http://schemas.microsoft.com/office/drawing/2014/main" id="{6FBE006A-BB06-F10F-ACCE-E1566ABBA838}"/>
+                <a16:creationId xmlns:a16="http://schemas.microsoft.com/office/drawing/2014/main" id="{FB8A090A-5219-1DDA-66A7-8C675423E409}"/>
               </a:ext>
             </a:extLst>
           </p:cNvPr>
@@ -525,7 +525,7 @@
           <p:cNvPr id="6" name="スライド番号プレースホルダー 5">
             <a:extLst>
               <a:ext uri="{FF2B5EF4-FFF2-40B4-BE49-F238E27FC236}">
-                <a16:creationId xmlns:a16="http://schemas.microsoft.com/office/drawing/2014/main" id="{B48671BF-EAB6-B3E4-F360-5283346D89AE}"/>
+                <a16:creationId xmlns:a16="http://schemas.microsoft.com/office/drawing/2014/main" id="{0A6D8C61-F560-AB33-7B33-8A72EBA9372B}"/>
               </a:ext>
             </a:extLst>
           </p:cNvPr>
@@ -541,7 +541,7 @@
           <a:bodyPr/>
           <a:lstStyle/>
           <a:p>
-            <a:fld id="{3AAC49E2-200C-4904-81BD-190727DA8FD6}" type="slidenum">
+            <a:fld id="{8084D719-0CFF-4FE4-BEE4-023CBCCB8895}" type="slidenum">
               <a:rPr kumimoji="1" lang="ja-JP" altLang="en-US" smtClean="0"/>
               <a:t>‹#›</a:t>
             </a:fld>
@@ -552,7 +552,7 @@
     </p:spTree>
     <p:extLst>
       <p:ext uri="{BB962C8B-B14F-4D97-AF65-F5344CB8AC3E}">
-        <p14:creationId xmlns:p14="http://schemas.microsoft.com/office/powerpoint/2010/main" val="4000499691"/>
+        <p14:creationId xmlns:p14="http://schemas.microsoft.com/office/powerpoint/2010/main" val="624693795"/>
       </p:ext>
     </p:extLst>
   </p:cSld>
@@ -584,7 +584,7 @@
           <p:cNvPr id="2" name="縦書きタイトル 1">
             <a:extLst>
               <a:ext uri="{FF2B5EF4-FFF2-40B4-BE49-F238E27FC236}">
-                <a16:creationId xmlns:a16="http://schemas.microsoft.com/office/drawing/2014/main" id="{C9967F6B-C2AA-7B16-22F8-3770CE4B50A0}"/>
+                <a16:creationId xmlns:a16="http://schemas.microsoft.com/office/drawing/2014/main" id="{4474A79F-6A66-B1FD-A19F-F96B53BAB2DC}"/>
               </a:ext>
             </a:extLst>
           </p:cNvPr>
@@ -617,7 +617,7 @@
           <p:cNvPr id="3" name="縦書きテキスト プレースホルダー 2">
             <a:extLst>
               <a:ext uri="{FF2B5EF4-FFF2-40B4-BE49-F238E27FC236}">
-                <a16:creationId xmlns:a16="http://schemas.microsoft.com/office/drawing/2014/main" id="{15FAA165-5F7C-214E-878C-7E3D3057F1B5}"/>
+                <a16:creationId xmlns:a16="http://schemas.microsoft.com/office/drawing/2014/main" id="{1188F3E2-28C1-EEDA-5A83-E55056BD3AD1}"/>
               </a:ext>
             </a:extLst>
           </p:cNvPr>
@@ -711,7 +711,7 @@
           <p:cNvPr id="4" name="日付プレースホルダー 3">
             <a:extLst>
               <a:ext uri="{FF2B5EF4-FFF2-40B4-BE49-F238E27FC236}">
-                <a16:creationId xmlns:a16="http://schemas.microsoft.com/office/drawing/2014/main" id="{E9EBD408-7961-249F-7F5A-93CA39898065}"/>
+                <a16:creationId xmlns:a16="http://schemas.microsoft.com/office/drawing/2014/main" id="{FCE77670-041E-E814-FFBC-4F64473B61F8}"/>
               </a:ext>
             </a:extLst>
           </p:cNvPr>
@@ -727,7 +727,7 @@
           <a:bodyPr/>
           <a:lstStyle/>
           <a:p>
-            <a:fld id="{C38B9B03-2810-4D15-92C0-C62052C6A8A4}" type="datetimeFigureOut">
+            <a:fld id="{8FE2805E-33CF-42E9-A724-30A81878CA04}" type="datetimeFigureOut">
               <a:rPr kumimoji="1" lang="ja-JP" altLang="en-US" smtClean="0"/>
               <a:t>2026/7/30</a:t>
             </a:fld>
@@ -740,7 +740,7 @@
           <p:cNvPr id="5" name="フッター プレースホルダー 4">
             <a:extLst>
               <a:ext uri="{FF2B5EF4-FFF2-40B4-BE49-F238E27FC236}">
-                <a16:creationId xmlns:a16="http://schemas.microsoft.com/office/drawing/2014/main" id="{05CA30EF-9992-FC7D-0BEF-F31AC4FE2B3F}"/>
+                <a16:creationId xmlns:a16="http://schemas.microsoft.com/office/drawing/2014/main" id="{03DA441A-20F0-80D1-9306-1D8D9211A69E}"/>
               </a:ext>
             </a:extLst>
           </p:cNvPr>
@@ -765,7 +765,7 @@
           <p:cNvPr id="6" name="スライド番号プレースホルダー 5">
             <a:extLst>
               <a:ext uri="{FF2B5EF4-FFF2-40B4-BE49-F238E27FC236}">
-                <a16:creationId xmlns:a16="http://schemas.microsoft.com/office/drawing/2014/main" id="{8CB3D83A-5475-381A-A009-15EB9BE011CB}"/>
+                <a16:creationId xmlns:a16="http://schemas.microsoft.com/office/drawing/2014/main" id="{9EFCD9AB-79CB-0C4B-ECF0-06CF3A77CF06}"/>
               </a:ext>
             </a:extLst>
           </p:cNvPr>
@@ -781,7 +781,7 @@
           <a:bodyPr/>
           <a:lstStyle/>
           <a:p>
-            <a:fld id="{3AAC49E2-200C-4904-81BD-190727DA8FD6}" type="slidenum">
+            <a:fld id="{8084D719-0CFF-4FE4-BEE4-023CBCCB8895}" type="slidenum">
               <a:rPr kumimoji="1" lang="ja-JP" altLang="en-US" smtClean="0"/>
               <a:t>‹#›</a:t>
             </a:fld>
@@ -792,7 +792,7 @@
     </p:spTree>
     <p:extLst>
       <p:ext uri="{BB962C8B-B14F-4D97-AF65-F5344CB8AC3E}">
-        <p14:creationId xmlns:p14="http://schemas.microsoft.com/office/powerpoint/2010/main" val="3176080279"/>
+        <p14:creationId xmlns:p14="http://schemas.microsoft.com/office/powerpoint/2010/main" val="1489835211"/>
       </p:ext>
     </p:extLst>
   </p:cSld>
@@ -824,7 +824,7 @@
           <p:cNvPr id="2" name="タイトル 1">
             <a:extLst>
               <a:ext uri="{FF2B5EF4-FFF2-40B4-BE49-F238E27FC236}">
-                <a16:creationId xmlns:a16="http://schemas.microsoft.com/office/drawing/2014/main" id="{E17CE449-EED9-4338-8FC1-53F495EFFB62}"/>
+                <a16:creationId xmlns:a16="http://schemas.microsoft.com/office/drawing/2014/main" id="{971B683B-0BE2-B398-4243-3AF23D36DCBA}"/>
               </a:ext>
             </a:extLst>
           </p:cNvPr>
@@ -852,7 +852,7 @@
           <p:cNvPr id="3" name="コンテンツ プレースホルダー 2">
             <a:extLst>
               <a:ext uri="{FF2B5EF4-FFF2-40B4-BE49-F238E27FC236}">
-                <a16:creationId xmlns:a16="http://schemas.microsoft.com/office/drawing/2014/main" id="{E2A84412-4621-9B9F-1481-F5E5B5495FE5}"/>
+                <a16:creationId xmlns:a16="http://schemas.microsoft.com/office/drawing/2014/main" id="{93E69B7C-7885-57D2-73C6-6DC507622CD6}"/>
               </a:ext>
             </a:extLst>
           </p:cNvPr>
@@ -941,7 +941,7 @@
           <p:cNvPr id="4" name="日付プレースホルダー 3">
             <a:extLst>
               <a:ext uri="{FF2B5EF4-FFF2-40B4-BE49-F238E27FC236}">
-                <a16:creationId xmlns:a16="http://schemas.microsoft.com/office/drawing/2014/main" id="{A5A46755-CCBF-2FC2-D863-D83344FE2349}"/>
+                <a16:creationId xmlns:a16="http://schemas.microsoft.com/office/drawing/2014/main" id="{104E6EA9-33CB-3113-0A80-DC8A891397BA}"/>
               </a:ext>
             </a:extLst>
           </p:cNvPr>
@@ -957,7 +957,7 @@
           <a:bodyPr/>
           <a:lstStyle/>
           <a:p>
-            <a:fld id="{C38B9B03-2810-4D15-92C0-C62052C6A8A4}" type="datetimeFigureOut">
+            <a:fld id="{8FE2805E-33CF-42E9-A724-30A81878CA04}" type="datetimeFigureOut">
               <a:rPr kumimoji="1" lang="ja-JP" altLang="en-US" smtClean="0"/>
               <a:t>2026/7/30</a:t>
             </a:fld>
@@ -970,7 +970,7 @@
           <p:cNvPr id="5" name="フッター プレースホルダー 4">
             <a:extLst>
               <a:ext uri="{FF2B5EF4-FFF2-40B4-BE49-F238E27FC236}">
-                <a16:creationId xmlns:a16="http://schemas.microsoft.com/office/drawing/2014/main" id="{292B65C1-9770-B874-8B0F-D05212A4C702}"/>
+                <a16:creationId xmlns:a16="http://schemas.microsoft.com/office/drawing/2014/main" id="{FF9C8FA3-CC80-CB8A-11D6-93D53CC6A4DA}"/>
               </a:ext>
             </a:extLst>
           </p:cNvPr>
@@ -995,7 +995,7 @@
           <p:cNvPr id="6" name="スライド番号プレースホルダー 5">
             <a:extLst>
               <a:ext uri="{FF2B5EF4-FFF2-40B4-BE49-F238E27FC236}">
-                <a16:creationId xmlns:a16="http://schemas.microsoft.com/office/drawing/2014/main" id="{1BDC73FD-0558-1230-D998-4803637E017A}"/>
+                <a16:creationId xmlns:a16="http://schemas.microsoft.com/office/drawing/2014/main" id="{FF1F1AEF-A9F8-CAED-BA90-E3153CAFE5D2}"/>
               </a:ext>
             </a:extLst>
           </p:cNvPr>
@@ -1011,7 +1011,7 @@
           <a:bodyPr/>
           <a:lstStyle/>
           <a:p>
-            <a:fld id="{3AAC49E2-200C-4904-81BD-190727DA8FD6}" type="slidenum">
+            <a:fld id="{8084D719-0CFF-4FE4-BEE4-023CBCCB8895}" type="slidenum">
               <a:rPr kumimoji="1" lang="ja-JP" altLang="en-US" smtClean="0"/>
               <a:t>‹#›</a:t>
             </a:fld>
@@ -1022,7 +1022,7 @@
     </p:spTree>
     <p:extLst>
       <p:ext uri="{BB962C8B-B14F-4D97-AF65-F5344CB8AC3E}">
-        <p14:creationId xmlns:p14="http://schemas.microsoft.com/office/powerpoint/2010/main" val="3929500489"/>
+        <p14:creationId xmlns:p14="http://schemas.microsoft.com/office/powerpoint/2010/main" val="3422316756"/>
       </p:ext>
     </p:extLst>
   </p:cSld>
@@ -1054,7 +1054,7 @@
           <p:cNvPr id="2" name="タイトル 1">
             <a:extLst>
               <a:ext uri="{FF2B5EF4-FFF2-40B4-BE49-F238E27FC236}">
-                <a16:creationId xmlns:a16="http://schemas.microsoft.com/office/drawing/2014/main" id="{80ACD832-E31E-7F87-5E72-6C5914DC8812}"/>
+                <a16:creationId xmlns:a16="http://schemas.microsoft.com/office/drawing/2014/main" id="{1158AFA9-F606-332A-B29D-28F072652BE9}"/>
               </a:ext>
             </a:extLst>
           </p:cNvPr>
@@ -1091,7 +1091,7 @@
           <p:cNvPr id="3" name="テキスト プレースホルダー 2">
             <a:extLst>
               <a:ext uri="{FF2B5EF4-FFF2-40B4-BE49-F238E27FC236}">
-                <a16:creationId xmlns:a16="http://schemas.microsoft.com/office/drawing/2014/main" id="{374C4262-F1CC-81E0-D52A-F49DB5CA0E5C}"/>
+                <a16:creationId xmlns:a16="http://schemas.microsoft.com/office/drawing/2014/main" id="{168F9A27-2B0B-08E1-B414-A36B650DA450}"/>
               </a:ext>
             </a:extLst>
           </p:cNvPr>
@@ -1216,7 +1216,7 @@
           <p:cNvPr id="4" name="日付プレースホルダー 3">
             <a:extLst>
               <a:ext uri="{FF2B5EF4-FFF2-40B4-BE49-F238E27FC236}">
-                <a16:creationId xmlns:a16="http://schemas.microsoft.com/office/drawing/2014/main" id="{D3A3B0FB-419D-1226-C7B3-AAAADF707E26}"/>
+                <a16:creationId xmlns:a16="http://schemas.microsoft.com/office/drawing/2014/main" id="{D0DE3FB2-BCCA-EC51-65FF-3E1D4DFC7292}"/>
               </a:ext>
             </a:extLst>
           </p:cNvPr>
@@ -1232,7 +1232,7 @@
           <a:bodyPr/>
           <a:lstStyle/>
           <a:p>
-            <a:fld id="{C38B9B03-2810-4D15-92C0-C62052C6A8A4}" type="datetimeFigureOut">
+            <a:fld id="{8FE2805E-33CF-42E9-A724-30A81878CA04}" type="datetimeFigureOut">
               <a:rPr kumimoji="1" lang="ja-JP" altLang="en-US" smtClean="0"/>
               <a:t>2026/7/30</a:t>
             </a:fld>
@@ -1245,7 +1245,7 @@
           <p:cNvPr id="5" name="フッター プレースホルダー 4">
             <a:extLst>
               <a:ext uri="{FF2B5EF4-FFF2-40B4-BE49-F238E27FC236}">
-                <a16:creationId xmlns:a16="http://schemas.microsoft.com/office/drawing/2014/main" id="{7AD8AB66-C77C-541B-CD20-087A8676CA61}"/>
+                <a16:creationId xmlns:a16="http://schemas.microsoft.com/office/drawing/2014/main" id="{2B0BA6F7-02FE-3397-CD20-01E89E74E531}"/>
               </a:ext>
             </a:extLst>
           </p:cNvPr>
@@ -1270,7 +1270,7 @@
           <p:cNvPr id="6" name="スライド番号プレースホルダー 5">
             <a:extLst>
               <a:ext uri="{FF2B5EF4-FFF2-40B4-BE49-F238E27FC236}">
-                <a16:creationId xmlns:a16="http://schemas.microsoft.com/office/drawing/2014/main" id="{2AE7BE1A-1DC5-F55A-7269-6280077582A3}"/>
+                <a16:creationId xmlns:a16="http://schemas.microsoft.com/office/drawing/2014/main" id="{30D551F8-9EDC-3B71-F227-F3D3859E284E}"/>
               </a:ext>
             </a:extLst>
           </p:cNvPr>
@@ -1286,7 +1286,7 @@
           <a:bodyPr/>
           <a:lstStyle/>
           <a:p>
-            <a:fld id="{3AAC49E2-200C-4904-81BD-190727DA8FD6}" type="slidenum">
+            <a:fld id="{8084D719-0CFF-4FE4-BEE4-023CBCCB8895}" type="slidenum">
               <a:rPr kumimoji="1" lang="ja-JP" altLang="en-US" smtClean="0"/>
               <a:t>‹#›</a:t>
             </a:fld>
@@ -1297,7 +1297,7 @@
     </p:spTree>
     <p:extLst>
       <p:ext uri="{BB962C8B-B14F-4D97-AF65-F5344CB8AC3E}">
-        <p14:creationId xmlns:p14="http://schemas.microsoft.com/office/powerpoint/2010/main" val="1884563212"/>
+        <p14:creationId xmlns:p14="http://schemas.microsoft.com/office/powerpoint/2010/main" val="3121763987"/>
       </p:ext>
     </p:extLst>
   </p:cSld>
@@ -1329,7 +1329,7 @@
           <p:cNvPr id="2" name="タイトル 1">
             <a:extLst>
               <a:ext uri="{FF2B5EF4-FFF2-40B4-BE49-F238E27FC236}">
-                <a16:creationId xmlns:a16="http://schemas.microsoft.com/office/drawing/2014/main" id="{013425FC-87B7-B3C3-2CC2-CB17D3433529}"/>
+                <a16:creationId xmlns:a16="http://schemas.microsoft.com/office/drawing/2014/main" id="{52B8F64F-5316-85F9-23CB-8AA4393F1292}"/>
               </a:ext>
             </a:extLst>
           </p:cNvPr>
@@ -1357,7 +1357,7 @@
           <p:cNvPr id="3" name="コンテンツ プレースホルダー 2">
             <a:extLst>
               <a:ext uri="{FF2B5EF4-FFF2-40B4-BE49-F238E27FC236}">
-                <a16:creationId xmlns:a16="http://schemas.microsoft.com/office/drawing/2014/main" id="{6F3ACC5C-4EED-A1EC-6561-23AFD06DA4D5}"/>
+                <a16:creationId xmlns:a16="http://schemas.microsoft.com/office/drawing/2014/main" id="{D8F3874D-3835-1A31-F820-6E52931C3D56}"/>
               </a:ext>
             </a:extLst>
           </p:cNvPr>
@@ -1451,7 +1451,7 @@
           <p:cNvPr id="4" name="コンテンツ プレースホルダー 3">
             <a:extLst>
               <a:ext uri="{FF2B5EF4-FFF2-40B4-BE49-F238E27FC236}">
-                <a16:creationId xmlns:a16="http://schemas.microsoft.com/office/drawing/2014/main" id="{74AE6626-A8EC-2E70-15FA-AEA8C8F9EF41}"/>
+                <a16:creationId xmlns:a16="http://schemas.microsoft.com/office/drawing/2014/main" id="{365C8430-145C-E367-3A46-87618C0A2A84}"/>
               </a:ext>
             </a:extLst>
           </p:cNvPr>
@@ -1545,7 +1545,7 @@
           <p:cNvPr id="5" name="日付プレースホルダー 4">
             <a:extLst>
               <a:ext uri="{FF2B5EF4-FFF2-40B4-BE49-F238E27FC236}">
-                <a16:creationId xmlns:a16="http://schemas.microsoft.com/office/drawing/2014/main" id="{678ACDC2-AE56-A5F6-7A99-09BA675AE6B4}"/>
+                <a16:creationId xmlns:a16="http://schemas.microsoft.com/office/drawing/2014/main" id="{749061A8-F5A0-6118-4BE1-F871A2634461}"/>
               </a:ext>
             </a:extLst>
           </p:cNvPr>
@@ -1561,7 +1561,7 @@
           <a:bodyPr/>
           <a:lstStyle/>
           <a:p>
-            <a:fld id="{C38B9B03-2810-4D15-92C0-C62052C6A8A4}" type="datetimeFigureOut">
+            <a:fld id="{8FE2805E-33CF-42E9-A724-30A81878CA04}" type="datetimeFigureOut">
               <a:rPr kumimoji="1" lang="ja-JP" altLang="en-US" smtClean="0"/>
               <a:t>2026/7/30</a:t>
             </a:fld>
@@ -1574,7 +1574,7 @@
           <p:cNvPr id="6" name="フッター プレースホルダー 5">
             <a:extLst>
               <a:ext uri="{FF2B5EF4-FFF2-40B4-BE49-F238E27FC236}">
-                <a16:creationId xmlns:a16="http://schemas.microsoft.com/office/drawing/2014/main" id="{CA2DEB12-3E28-ED72-761B-08797B9F004F}"/>
+                <a16:creationId xmlns:a16="http://schemas.microsoft.com/office/drawing/2014/main" id="{199C8CEF-4E62-4BBF-E95D-CE58E9EA8B3C}"/>
               </a:ext>
             </a:extLst>
           </p:cNvPr>
@@ -1599,7 +1599,7 @@
           <p:cNvPr id="7" name="スライド番号プレースホルダー 6">
             <a:extLst>
               <a:ext uri="{FF2B5EF4-FFF2-40B4-BE49-F238E27FC236}">
-                <a16:creationId xmlns:a16="http://schemas.microsoft.com/office/drawing/2014/main" id="{272B35B9-392F-431D-CCE7-B58238C194C8}"/>
+                <a16:creationId xmlns:a16="http://schemas.microsoft.com/office/drawing/2014/main" id="{87730F07-4415-C132-1361-4F8258380B82}"/>
               </a:ext>
             </a:extLst>
           </p:cNvPr>
@@ -1615,7 +1615,7 @@
           <a:bodyPr/>
           <a:lstStyle/>
           <a:p>
-            <a:fld id="{3AAC49E2-200C-4904-81BD-190727DA8FD6}" type="slidenum">
+            <a:fld id="{8084D719-0CFF-4FE4-BEE4-023CBCCB8895}" type="slidenum">
               <a:rPr kumimoji="1" lang="ja-JP" altLang="en-US" smtClean="0"/>
               <a:t>‹#›</a:t>
             </a:fld>
@@ -1626,7 +1626,7 @@
     </p:spTree>
     <p:extLst>
       <p:ext uri="{BB962C8B-B14F-4D97-AF65-F5344CB8AC3E}">
-        <p14:creationId xmlns:p14="http://schemas.microsoft.com/office/powerpoint/2010/main" val="3821008394"/>
+        <p14:creationId xmlns:p14="http://schemas.microsoft.com/office/powerpoint/2010/main" val="1164611800"/>
       </p:ext>
     </p:extLst>
   </p:cSld>
@@ -1658,7 +1658,7 @@
           <p:cNvPr id="2" name="タイトル 1">
             <a:extLst>
               <a:ext uri="{FF2B5EF4-FFF2-40B4-BE49-F238E27FC236}">
-                <a16:creationId xmlns:a16="http://schemas.microsoft.com/office/drawing/2014/main" id="{2ED4C069-B545-3B91-43F0-6D3366AA1B03}"/>
+                <a16:creationId xmlns:a16="http://schemas.microsoft.com/office/drawing/2014/main" id="{51D42043-2A4E-429F-22FC-CC767CC522E9}"/>
               </a:ext>
             </a:extLst>
           </p:cNvPr>
@@ -1691,7 +1691,7 @@
           <p:cNvPr id="3" name="テキスト プレースホルダー 2">
             <a:extLst>
               <a:ext uri="{FF2B5EF4-FFF2-40B4-BE49-F238E27FC236}">
-                <a16:creationId xmlns:a16="http://schemas.microsoft.com/office/drawing/2014/main" id="{C39BCE57-BA28-E21B-88BF-70F1F692705E}"/>
+                <a16:creationId xmlns:a16="http://schemas.microsoft.com/office/drawing/2014/main" id="{69F713F8-F418-30C0-8B54-9362F497E4E2}"/>
               </a:ext>
             </a:extLst>
           </p:cNvPr>
@@ -1762,7 +1762,7 @@
           <p:cNvPr id="4" name="コンテンツ プレースホルダー 3">
             <a:extLst>
               <a:ext uri="{FF2B5EF4-FFF2-40B4-BE49-F238E27FC236}">
-                <a16:creationId xmlns:a16="http://schemas.microsoft.com/office/drawing/2014/main" id="{71C35BF5-4870-7E4C-875B-5910879CA1FB}"/>
+                <a16:creationId xmlns:a16="http://schemas.microsoft.com/office/drawing/2014/main" id="{B7C9665D-B680-5D50-CA25-9334C1FC650C}"/>
               </a:ext>
             </a:extLst>
           </p:cNvPr>
@@ -1856,7 +1856,7 @@
           <p:cNvPr id="5" name="テキスト プレースホルダー 4">
             <a:extLst>
               <a:ext uri="{FF2B5EF4-FFF2-40B4-BE49-F238E27FC236}">
-                <a16:creationId xmlns:a16="http://schemas.microsoft.com/office/drawing/2014/main" id="{D676962D-0E52-20EE-62D3-CFF5AF209105}"/>
+                <a16:creationId xmlns:a16="http://schemas.microsoft.com/office/drawing/2014/main" id="{19E6677C-2331-AF94-7A98-EA9DF6F75DAF}"/>
               </a:ext>
             </a:extLst>
           </p:cNvPr>
@@ -1927,7 +1927,7 @@
           <p:cNvPr id="6" name="コンテンツ プレースホルダー 5">
             <a:extLst>
               <a:ext uri="{FF2B5EF4-FFF2-40B4-BE49-F238E27FC236}">
-                <a16:creationId xmlns:a16="http://schemas.microsoft.com/office/drawing/2014/main" id="{86DDC67E-1DFA-13E5-8DD8-6AB713994678}"/>
+                <a16:creationId xmlns:a16="http://schemas.microsoft.com/office/drawing/2014/main" id="{6135B0EE-CD85-330D-D0EC-84ADF4A6A06C}"/>
               </a:ext>
             </a:extLst>
           </p:cNvPr>
@@ -2021,7 +2021,7 @@
           <p:cNvPr id="7" name="日付プレースホルダー 6">
             <a:extLst>
               <a:ext uri="{FF2B5EF4-FFF2-40B4-BE49-F238E27FC236}">
-                <a16:creationId xmlns:a16="http://schemas.microsoft.com/office/drawing/2014/main" id="{9104A2A1-DCEF-8952-3FA7-333CA993DB51}"/>
+                <a16:creationId xmlns:a16="http://schemas.microsoft.com/office/drawing/2014/main" id="{E321FFD3-7A59-842F-8830-B312CA29798C}"/>
               </a:ext>
             </a:extLst>
           </p:cNvPr>
@@ -2037,7 +2037,7 @@
           <a:bodyPr/>
           <a:lstStyle/>
           <a:p>
-            <a:fld id="{C38B9B03-2810-4D15-92C0-C62052C6A8A4}" type="datetimeFigureOut">
+            <a:fld id="{8FE2805E-33CF-42E9-A724-30A81878CA04}" type="datetimeFigureOut">
               <a:rPr kumimoji="1" lang="ja-JP" altLang="en-US" smtClean="0"/>
               <a:t>2026/7/30</a:t>
             </a:fld>
@@ -2050,7 +2050,7 @@
           <p:cNvPr id="8" name="フッター プレースホルダー 7">
             <a:extLst>
               <a:ext uri="{FF2B5EF4-FFF2-40B4-BE49-F238E27FC236}">
-                <a16:creationId xmlns:a16="http://schemas.microsoft.com/office/drawing/2014/main" id="{CB9B6220-A7CA-9DE5-3160-464E71F748D7}"/>
+                <a16:creationId xmlns:a16="http://schemas.microsoft.com/office/drawing/2014/main" id="{D5833802-200B-8348-9B72-389A914C3CA2}"/>
               </a:ext>
             </a:extLst>
           </p:cNvPr>
@@ -2075,7 +2075,7 @@
           <p:cNvPr id="9" name="スライド番号プレースホルダー 8">
             <a:extLst>
               <a:ext uri="{FF2B5EF4-FFF2-40B4-BE49-F238E27FC236}">
-                <a16:creationId xmlns:a16="http://schemas.microsoft.com/office/drawing/2014/main" id="{8A6741F5-9B33-1594-C60E-0166513F4718}"/>
+                <a16:creationId xmlns:a16="http://schemas.microsoft.com/office/drawing/2014/main" id="{6E461B3E-A948-B34B-2E04-0252F3090024}"/>
               </a:ext>
             </a:extLst>
           </p:cNvPr>
@@ -2091,7 +2091,7 @@
           <a:bodyPr/>
           <a:lstStyle/>
           <a:p>
-            <a:fld id="{3AAC49E2-200C-4904-81BD-190727DA8FD6}" type="slidenum">
+            <a:fld id="{8084D719-0CFF-4FE4-BEE4-023CBCCB8895}" type="slidenum">
               <a:rPr kumimoji="1" lang="ja-JP" altLang="en-US" smtClean="0"/>
               <a:t>‹#›</a:t>
             </a:fld>
@@ -2102,7 +2102,7 @@
     </p:spTree>
     <p:extLst>
       <p:ext uri="{BB962C8B-B14F-4D97-AF65-F5344CB8AC3E}">
-        <p14:creationId xmlns:p14="http://schemas.microsoft.com/office/powerpoint/2010/main" val="4157714766"/>
+        <p14:creationId xmlns:p14="http://schemas.microsoft.com/office/powerpoint/2010/main" val="3466178421"/>
       </p:ext>
     </p:extLst>
   </p:cSld>
@@ -2134,7 +2134,7 @@
           <p:cNvPr id="2" name="タイトル 1">
             <a:extLst>
               <a:ext uri="{FF2B5EF4-FFF2-40B4-BE49-F238E27FC236}">
-                <a16:creationId xmlns:a16="http://schemas.microsoft.com/office/drawing/2014/main" id="{73110BC0-F6F7-97A1-E05C-3BE042445E33}"/>
+                <a16:creationId xmlns:a16="http://schemas.microsoft.com/office/drawing/2014/main" id="{CB65332B-462A-1A16-1B60-C87A27EBFF9C}"/>
               </a:ext>
             </a:extLst>
           </p:cNvPr>
@@ -2162,7 +2162,7 @@
           <p:cNvPr id="3" name="日付プレースホルダー 2">
             <a:extLst>
               <a:ext uri="{FF2B5EF4-FFF2-40B4-BE49-F238E27FC236}">
-                <a16:creationId xmlns:a16="http://schemas.microsoft.com/office/drawing/2014/main" id="{2B57A43E-D1E5-A2D4-9A22-DC0BBFF89DD8}"/>
+                <a16:creationId xmlns:a16="http://schemas.microsoft.com/office/drawing/2014/main" id="{DE08357C-4F6C-6081-1E4D-A8B9EFE17C45}"/>
               </a:ext>
             </a:extLst>
           </p:cNvPr>
@@ -2178,7 +2178,7 @@
           <a:bodyPr/>
           <a:lstStyle/>
           <a:p>
-            <a:fld id="{C38B9B03-2810-4D15-92C0-C62052C6A8A4}" type="datetimeFigureOut">
+            <a:fld id="{8FE2805E-33CF-42E9-A724-30A81878CA04}" type="datetimeFigureOut">
               <a:rPr kumimoji="1" lang="ja-JP" altLang="en-US" smtClean="0"/>
               <a:t>2026/7/30</a:t>
             </a:fld>
@@ -2191,7 +2191,7 @@
           <p:cNvPr id="4" name="フッター プレースホルダー 3">
             <a:extLst>
               <a:ext uri="{FF2B5EF4-FFF2-40B4-BE49-F238E27FC236}">
-                <a16:creationId xmlns:a16="http://schemas.microsoft.com/office/drawing/2014/main" id="{23A5AF4E-907C-105E-5761-47AF550202AD}"/>
+                <a16:creationId xmlns:a16="http://schemas.microsoft.com/office/drawing/2014/main" id="{8C118B3F-4E4B-19E6-CA49-67ECF15DDD9D}"/>
               </a:ext>
             </a:extLst>
           </p:cNvPr>
@@ -2216,7 +2216,7 @@
           <p:cNvPr id="5" name="スライド番号プレースホルダー 4">
             <a:extLst>
               <a:ext uri="{FF2B5EF4-FFF2-40B4-BE49-F238E27FC236}">
-                <a16:creationId xmlns:a16="http://schemas.microsoft.com/office/drawing/2014/main" id="{EE6073F6-A45F-B35C-F527-FE423FFE83D6}"/>
+                <a16:creationId xmlns:a16="http://schemas.microsoft.com/office/drawing/2014/main" id="{88D29EC3-93E4-9425-FC33-843E1B2A4B13}"/>
               </a:ext>
             </a:extLst>
           </p:cNvPr>
@@ -2232,7 +2232,7 @@
           <a:bodyPr/>
           <a:lstStyle/>
           <a:p>
-            <a:fld id="{3AAC49E2-200C-4904-81BD-190727DA8FD6}" type="slidenum">
+            <a:fld id="{8084D719-0CFF-4FE4-BEE4-023CBCCB8895}" type="slidenum">
               <a:rPr kumimoji="1" lang="ja-JP" altLang="en-US" smtClean="0"/>
               <a:t>‹#›</a:t>
             </a:fld>
@@ -2243,7 +2243,7 @@
     </p:spTree>
     <p:extLst>
       <p:ext uri="{BB962C8B-B14F-4D97-AF65-F5344CB8AC3E}">
-        <p14:creationId xmlns:p14="http://schemas.microsoft.com/office/powerpoint/2010/main" val="1832030645"/>
+        <p14:creationId xmlns:p14="http://schemas.microsoft.com/office/powerpoint/2010/main" val="4261629021"/>
       </p:ext>
     </p:extLst>
   </p:cSld>
@@ -2275,7 +2275,7 @@
           <p:cNvPr id="2" name="日付プレースホルダー 1">
             <a:extLst>
               <a:ext uri="{FF2B5EF4-FFF2-40B4-BE49-F238E27FC236}">
-                <a16:creationId xmlns:a16="http://schemas.microsoft.com/office/drawing/2014/main" id="{3D1BDCBD-B35A-D896-3FB1-5085C99EC7B5}"/>
+                <a16:creationId xmlns:a16="http://schemas.microsoft.com/office/drawing/2014/main" id="{B1B311B6-46ED-46A5-68DF-EEAB2CB627F1}"/>
               </a:ext>
             </a:extLst>
           </p:cNvPr>
@@ -2291,7 +2291,7 @@
           <a:bodyPr/>
           <a:lstStyle/>
           <a:p>
-            <a:fld id="{C38B9B03-2810-4D15-92C0-C62052C6A8A4}" type="datetimeFigureOut">
+            <a:fld id="{8FE2805E-33CF-42E9-A724-30A81878CA04}" type="datetimeFigureOut">
               <a:rPr kumimoji="1" lang="ja-JP" altLang="en-US" smtClean="0"/>
               <a:t>2026/7/30</a:t>
             </a:fld>
@@ -2304,7 +2304,7 @@
           <p:cNvPr id="3" name="フッター プレースホルダー 2">
             <a:extLst>
               <a:ext uri="{FF2B5EF4-FFF2-40B4-BE49-F238E27FC236}">
-                <a16:creationId xmlns:a16="http://schemas.microsoft.com/office/drawing/2014/main" id="{A6E8D136-4B9E-EE83-06B9-D0294DE18BC6}"/>
+                <a16:creationId xmlns:a16="http://schemas.microsoft.com/office/drawing/2014/main" id="{5E69D1BB-AA83-7828-A14A-A50A01ED8653}"/>
               </a:ext>
             </a:extLst>
           </p:cNvPr>
@@ -2329,7 +2329,7 @@
           <p:cNvPr id="4" name="スライド番号プレースホルダー 3">
             <a:extLst>
               <a:ext uri="{FF2B5EF4-FFF2-40B4-BE49-F238E27FC236}">
-                <a16:creationId xmlns:a16="http://schemas.microsoft.com/office/drawing/2014/main" id="{91059376-22D4-8FC2-AFE5-32AFD18103E9}"/>
+                <a16:creationId xmlns:a16="http://schemas.microsoft.com/office/drawing/2014/main" id="{D783CBE4-7023-DC7D-C2AE-C8EAD3C1E63F}"/>
               </a:ext>
             </a:extLst>
           </p:cNvPr>
@@ -2345,7 +2345,7 @@
           <a:bodyPr/>
           <a:lstStyle/>
           <a:p>
-            <a:fld id="{3AAC49E2-200C-4904-81BD-190727DA8FD6}" type="slidenum">
+            <a:fld id="{8084D719-0CFF-4FE4-BEE4-023CBCCB8895}" type="slidenum">
               <a:rPr kumimoji="1" lang="ja-JP" altLang="en-US" smtClean="0"/>
               <a:t>‹#›</a:t>
             </a:fld>
@@ -2356,7 +2356,7 @@
     </p:spTree>
     <p:extLst>
       <p:ext uri="{BB962C8B-B14F-4D97-AF65-F5344CB8AC3E}">
-        <p14:creationId xmlns:p14="http://schemas.microsoft.com/office/powerpoint/2010/main" val="1109599767"/>
+        <p14:creationId xmlns:p14="http://schemas.microsoft.com/office/powerpoint/2010/main" val="3806061267"/>
       </p:ext>
     </p:extLst>
   </p:cSld>
@@ -2388,7 +2388,7 @@
           <p:cNvPr id="2" name="タイトル 1">
             <a:extLst>
               <a:ext uri="{FF2B5EF4-FFF2-40B4-BE49-F238E27FC236}">
-                <a16:creationId xmlns:a16="http://schemas.microsoft.com/office/drawing/2014/main" id="{B6220BA3-CF5D-E203-C803-23617C1A9BD0}"/>
+                <a16:creationId xmlns:a16="http://schemas.microsoft.com/office/drawing/2014/main" id="{B2AB1D34-E6DD-3C7D-7B23-9E19A151BB0D}"/>
               </a:ext>
             </a:extLst>
           </p:cNvPr>
@@ -2425,7 +2425,7 @@
           <p:cNvPr id="3" name="コンテンツ プレースホルダー 2">
             <a:extLst>
               <a:ext uri="{FF2B5EF4-FFF2-40B4-BE49-F238E27FC236}">
-                <a16:creationId xmlns:a16="http://schemas.microsoft.com/office/drawing/2014/main" id="{0E2F73BC-5A28-4F71-883A-295FF6AFA165}"/>
+                <a16:creationId xmlns:a16="http://schemas.microsoft.com/office/drawing/2014/main" id="{40F2EE65-4476-B0F5-0ABE-AED66DEE1C8E}"/>
               </a:ext>
             </a:extLst>
           </p:cNvPr>
@@ -2547,7 +2547,7 @@
           <p:cNvPr id="4" name="テキスト プレースホルダー 3">
             <a:extLst>
               <a:ext uri="{FF2B5EF4-FFF2-40B4-BE49-F238E27FC236}">
-                <a16:creationId xmlns:a16="http://schemas.microsoft.com/office/drawing/2014/main" id="{6555D75E-B4BD-A799-3546-BCB1A3E603E8}"/>
+                <a16:creationId xmlns:a16="http://schemas.microsoft.com/office/drawing/2014/main" id="{CDE61905-AC36-C054-8E4E-4576549AB1E3}"/>
               </a:ext>
             </a:extLst>
           </p:cNvPr>
@@ -2618,7 +2618,7 @@
           <p:cNvPr id="5" name="日付プレースホルダー 4">
             <a:extLst>
               <a:ext uri="{FF2B5EF4-FFF2-40B4-BE49-F238E27FC236}">
-                <a16:creationId xmlns:a16="http://schemas.microsoft.com/office/drawing/2014/main" id="{D68555B2-6218-779F-4095-B964181A2008}"/>
+                <a16:creationId xmlns:a16="http://schemas.microsoft.com/office/drawing/2014/main" id="{847E5FE1-44EC-F165-EC47-D3E6114B64AF}"/>
               </a:ext>
             </a:extLst>
           </p:cNvPr>
@@ -2634,7 +2634,7 @@
           <a:bodyPr/>
           <a:lstStyle/>
           <a:p>
-            <a:fld id="{C38B9B03-2810-4D15-92C0-C62052C6A8A4}" type="datetimeFigureOut">
+            <a:fld id="{8FE2805E-33CF-42E9-A724-30A81878CA04}" type="datetimeFigureOut">
               <a:rPr kumimoji="1" lang="ja-JP" altLang="en-US" smtClean="0"/>
               <a:t>2026/7/30</a:t>
             </a:fld>
@@ -2647,7 +2647,7 @@
           <p:cNvPr id="6" name="フッター プレースホルダー 5">
             <a:extLst>
               <a:ext uri="{FF2B5EF4-FFF2-40B4-BE49-F238E27FC236}">
-                <a16:creationId xmlns:a16="http://schemas.microsoft.com/office/drawing/2014/main" id="{88ABFD1B-8181-6B45-1BD6-82412963895C}"/>
+                <a16:creationId xmlns:a16="http://schemas.microsoft.com/office/drawing/2014/main" id="{E09DA545-2CE1-B459-1FAD-50C348F51ADA}"/>
               </a:ext>
             </a:extLst>
           </p:cNvPr>
@@ -2672,7 +2672,7 @@
           <p:cNvPr id="7" name="スライド番号プレースホルダー 6">
             <a:extLst>
               <a:ext uri="{FF2B5EF4-FFF2-40B4-BE49-F238E27FC236}">
-                <a16:creationId xmlns:a16="http://schemas.microsoft.com/office/drawing/2014/main" id="{14A669B5-355B-CE75-DD33-346DF35FDDA3}"/>
+                <a16:creationId xmlns:a16="http://schemas.microsoft.com/office/drawing/2014/main" id="{F0032E68-3FFF-7B85-505F-22FB6058A7AC}"/>
               </a:ext>
             </a:extLst>
           </p:cNvPr>
@@ -2688,7 +2688,7 @@
           <a:bodyPr/>
           <a:lstStyle/>
           <a:p>
-            <a:fld id="{3AAC49E2-200C-4904-81BD-190727DA8FD6}" type="slidenum">
+            <a:fld id="{8084D719-0CFF-4FE4-BEE4-023CBCCB8895}" type="slidenum">
               <a:rPr kumimoji="1" lang="ja-JP" altLang="en-US" smtClean="0"/>
               <a:t>‹#›</a:t>
             </a:fld>
@@ -2699,7 +2699,7 @@
     </p:spTree>
     <p:extLst>
       <p:ext uri="{BB962C8B-B14F-4D97-AF65-F5344CB8AC3E}">
-        <p14:creationId xmlns:p14="http://schemas.microsoft.com/office/powerpoint/2010/main" val="3260666080"/>
+        <p14:creationId xmlns:p14="http://schemas.microsoft.com/office/powerpoint/2010/main" val="3845028189"/>
       </p:ext>
     </p:extLst>
   </p:cSld>
@@ -2731,7 +2731,7 @@
           <p:cNvPr id="2" name="タイトル 1">
             <a:extLst>
               <a:ext uri="{FF2B5EF4-FFF2-40B4-BE49-F238E27FC236}">
-                <a16:creationId xmlns:a16="http://schemas.microsoft.com/office/drawing/2014/main" id="{7D248844-C609-0644-61B8-E8DDB8452B68}"/>
+                <a16:creationId xmlns:a16="http://schemas.microsoft.com/office/drawing/2014/main" id="{76610973-CA38-B2DC-4783-E221E706CB37}"/>
               </a:ext>
             </a:extLst>
           </p:cNvPr>
@@ -2768,7 +2768,7 @@
           <p:cNvPr id="3" name="図プレースホルダー 2">
             <a:extLst>
               <a:ext uri="{FF2B5EF4-FFF2-40B4-BE49-F238E27FC236}">
-                <a16:creationId xmlns:a16="http://schemas.microsoft.com/office/drawing/2014/main" id="{165627AC-DE87-0B86-59C1-56CFAF314B5A}"/>
+                <a16:creationId xmlns:a16="http://schemas.microsoft.com/office/drawing/2014/main" id="{59B84A84-A3E6-D95F-A1BF-E4B6F6793473}"/>
               </a:ext>
             </a:extLst>
           </p:cNvPr>
@@ -2835,7 +2835,7 @@
           <p:cNvPr id="4" name="テキスト プレースホルダー 3">
             <a:extLst>
               <a:ext uri="{FF2B5EF4-FFF2-40B4-BE49-F238E27FC236}">
-                <a16:creationId xmlns:a16="http://schemas.microsoft.com/office/drawing/2014/main" id="{54DAF870-95C9-64E0-512F-D71B88A3B4BF}"/>
+                <a16:creationId xmlns:a16="http://schemas.microsoft.com/office/drawing/2014/main" id="{18BF9F74-F10E-65C3-AF04-234F20D5C959}"/>
               </a:ext>
             </a:extLst>
           </p:cNvPr>
@@ -2906,7 +2906,7 @@
           <p:cNvPr id="5" name="日付プレースホルダー 4">
             <a:extLst>
               <a:ext uri="{FF2B5EF4-FFF2-40B4-BE49-F238E27FC236}">
-                <a16:creationId xmlns:a16="http://schemas.microsoft.com/office/drawing/2014/main" id="{BED363AD-7944-B973-6FB6-BDA2069CA016}"/>
+                <a16:creationId xmlns:a16="http://schemas.microsoft.com/office/drawing/2014/main" id="{554938AD-77F1-06E8-0634-FAD012181E3C}"/>
               </a:ext>
             </a:extLst>
           </p:cNvPr>
@@ -2922,7 +2922,7 @@
           <a:bodyPr/>
           <a:lstStyle/>
           <a:p>
-            <a:fld id="{C38B9B03-2810-4D15-92C0-C62052C6A8A4}" type="datetimeFigureOut">
+            <a:fld id="{8FE2805E-33CF-42E9-A724-30A81878CA04}" type="datetimeFigureOut">
               <a:rPr kumimoji="1" lang="ja-JP" altLang="en-US" smtClean="0"/>
               <a:t>2026/7/30</a:t>
             </a:fld>
@@ -2935,7 +2935,7 @@
           <p:cNvPr id="6" name="フッター プレースホルダー 5">
             <a:extLst>
               <a:ext uri="{FF2B5EF4-FFF2-40B4-BE49-F238E27FC236}">
-                <a16:creationId xmlns:a16="http://schemas.microsoft.com/office/drawing/2014/main" id="{BD2B7945-9495-32A1-47DF-E5F3B9E68585}"/>
+                <a16:creationId xmlns:a16="http://schemas.microsoft.com/office/drawing/2014/main" id="{48DDDC48-2A70-C762-F3FB-63CF97E458B8}"/>
               </a:ext>
             </a:extLst>
           </p:cNvPr>
@@ -2960,7 +2960,7 @@
           <p:cNvPr id="7" name="スライド番号プレースホルダー 6">
             <a:extLst>
               <a:ext uri="{FF2B5EF4-FFF2-40B4-BE49-F238E27FC236}">
-                <a16:creationId xmlns:a16="http://schemas.microsoft.com/office/drawing/2014/main" id="{3B8755EE-E7AF-2F04-E278-AA9624F4BD23}"/>
+                <a16:creationId xmlns:a16="http://schemas.microsoft.com/office/drawing/2014/main" id="{096F3F3C-B90D-3DCE-88CD-BC441953A669}"/>
               </a:ext>
             </a:extLst>
           </p:cNvPr>
@@ -2976,7 +2976,7 @@
           <a:bodyPr/>
           <a:lstStyle/>
           <a:p>
-            <a:fld id="{3AAC49E2-200C-4904-81BD-190727DA8FD6}" type="slidenum">
+            <a:fld id="{8084D719-0CFF-4FE4-BEE4-023CBCCB8895}" type="slidenum">
               <a:rPr kumimoji="1" lang="ja-JP" altLang="en-US" smtClean="0"/>
               <a:t>‹#›</a:t>
             </a:fld>
@@ -2987,7 +2987,7 @@
     </p:spTree>
     <p:extLst>
       <p:ext uri="{BB962C8B-B14F-4D97-AF65-F5344CB8AC3E}">
-        <p14:creationId xmlns:p14="http://schemas.microsoft.com/office/powerpoint/2010/main" val="1538767140"/>
+        <p14:creationId xmlns:p14="http://schemas.microsoft.com/office/powerpoint/2010/main" val="642638940"/>
       </p:ext>
     </p:extLst>
   </p:cSld>
@@ -3024,7 +3024,7 @@
           <p:cNvPr id="2" name="タイトル プレースホルダー 1">
             <a:extLst>
               <a:ext uri="{FF2B5EF4-FFF2-40B4-BE49-F238E27FC236}">
-                <a16:creationId xmlns:a16="http://schemas.microsoft.com/office/drawing/2014/main" id="{50F0DF83-64E3-70D0-1B46-ED0BBA482A65}"/>
+                <a16:creationId xmlns:a16="http://schemas.microsoft.com/office/drawing/2014/main" id="{CA8C1AC5-E3E8-8714-9F52-A89979161DB6}"/>
               </a:ext>
             </a:extLst>
           </p:cNvPr>
@@ -3062,7 +3062,7 @@
           <p:cNvPr id="3" name="テキスト プレースホルダー 2">
             <a:extLst>
               <a:ext uri="{FF2B5EF4-FFF2-40B4-BE49-F238E27FC236}">
-                <a16:creationId xmlns:a16="http://schemas.microsoft.com/office/drawing/2014/main" id="{73D7714B-657C-93F4-1AAC-338547996630}"/>
+                <a16:creationId xmlns:a16="http://schemas.microsoft.com/office/drawing/2014/main" id="{492EA1AB-E01D-5D9C-88C8-F0B1295654CE}"/>
               </a:ext>
             </a:extLst>
           </p:cNvPr>
@@ -3161,7 +3161,7 @@
           <p:cNvPr id="4" name="日付プレースホルダー 3">
             <a:extLst>
               <a:ext uri="{FF2B5EF4-FFF2-40B4-BE49-F238E27FC236}">
-                <a16:creationId xmlns:a16="http://schemas.microsoft.com/office/drawing/2014/main" id="{5B4BBB41-B228-12E7-4FD0-CA7F1222A0DC}"/>
+                <a16:creationId xmlns:a16="http://schemas.microsoft.com/office/drawing/2014/main" id="{B61833A8-88CC-8911-B43D-8895E8034E8B}"/>
               </a:ext>
             </a:extLst>
           </p:cNvPr>
@@ -3195,7 +3195,7 @@
             </a:lvl1pPr>
           </a:lstStyle>
           <a:p>
-            <a:fld id="{C38B9B03-2810-4D15-92C0-C62052C6A8A4}" type="datetimeFigureOut">
+            <a:fld id="{8FE2805E-33CF-42E9-A724-30A81878CA04}" type="datetimeFigureOut">
               <a:rPr kumimoji="1" lang="ja-JP" altLang="en-US" smtClean="0"/>
               <a:t>2026/7/30</a:t>
             </a:fld>
@@ -3208,7 +3208,7 @@
           <p:cNvPr id="5" name="フッター プレースホルダー 4">
             <a:extLst>
               <a:ext uri="{FF2B5EF4-FFF2-40B4-BE49-F238E27FC236}">
-                <a16:creationId xmlns:a16="http://schemas.microsoft.com/office/drawing/2014/main" id="{B433B44D-3D53-10DF-257B-6A91164FE73A}"/>
+                <a16:creationId xmlns:a16="http://schemas.microsoft.com/office/drawing/2014/main" id="{1BAE0745-3C98-4C15-7B3B-57F06439FF9C}"/>
               </a:ext>
             </a:extLst>
           </p:cNvPr>
@@ -3251,7 +3251,7 @@
           <p:cNvPr id="6" name="スライド番号プレースホルダー 5">
             <a:extLst>
               <a:ext uri="{FF2B5EF4-FFF2-40B4-BE49-F238E27FC236}">
-                <a16:creationId xmlns:a16="http://schemas.microsoft.com/office/drawing/2014/main" id="{48923C2D-1946-5F1F-B49D-11158A24DDDB}"/>
+                <a16:creationId xmlns:a16="http://schemas.microsoft.com/office/drawing/2014/main" id="{F0B1434C-7078-24B7-4803-3E3C710A3A7D}"/>
               </a:ext>
             </a:extLst>
           </p:cNvPr>
@@ -3285,7 +3285,7 @@
             </a:lvl1pPr>
           </a:lstStyle>
           <a:p>
-            <a:fld id="{3AAC49E2-200C-4904-81BD-190727DA8FD6}" type="slidenum">
+            <a:fld id="{8084D719-0CFF-4FE4-BEE4-023CBCCB8895}" type="slidenum">
               <a:rPr kumimoji="1" lang="ja-JP" altLang="en-US" smtClean="0"/>
               <a:t>‹#›</a:t>
             </a:fld>
@@ -3296,7 +3296,7 @@
     </p:spTree>
     <p:extLst>
       <p:ext uri="{BB962C8B-B14F-4D97-AF65-F5344CB8AC3E}">
-        <p14:creationId xmlns:p14="http://schemas.microsoft.com/office/powerpoint/2010/main" val="1840825605"/>
+        <p14:creationId xmlns:p14="http://schemas.microsoft.com/office/powerpoint/2010/main" val="1311737153"/>
       </p:ext>
     </p:extLst>
   </p:cSld>
@@ -3619,7 +3619,7 @@
           <p:cNvPr id="2" name="テキスト ボックス 1">
             <a:extLst>
               <a:ext uri="{FF2B5EF4-FFF2-40B4-BE49-F238E27FC236}">
-                <a16:creationId xmlns:a16="http://schemas.microsoft.com/office/drawing/2014/main" id="{38EA3EC6-30F4-B219-743F-AC5727485B2B}"/>
+                <a16:creationId xmlns:a16="http://schemas.microsoft.com/office/drawing/2014/main" id="{5A1AD55D-3EDC-0F24-6FCA-50AF3CC8B7E3}"/>
               </a:ext>
             </a:extLst>
           </p:cNvPr>
@@ -3665,7 +3665,7 @@
           <p:cNvPr id="3" name="テキスト ボックス 2">
             <a:extLst>
               <a:ext uri="{FF2B5EF4-FFF2-40B4-BE49-F238E27FC236}">
-                <a16:creationId xmlns:a16="http://schemas.microsoft.com/office/drawing/2014/main" id="{751BFAC9-EA56-02EC-797A-F05F4E8E6783}"/>
+                <a16:creationId xmlns:a16="http://schemas.microsoft.com/office/drawing/2014/main" id="{2FE46188-79D5-4280-F532-7A4D5A8C0DDD}"/>
               </a:ext>
             </a:extLst>
           </p:cNvPr>
@@ -3714,7 +3714,7 @@
           <p:cNvPr id="4" name="テキスト ボックス 3">
             <a:extLst>
               <a:ext uri="{FF2B5EF4-FFF2-40B4-BE49-F238E27FC236}">
-                <a16:creationId xmlns:a16="http://schemas.microsoft.com/office/drawing/2014/main" id="{248A00D9-76FB-AEAB-67FF-6F0037F661CA}"/>
+                <a16:creationId xmlns:a16="http://schemas.microsoft.com/office/drawing/2014/main" id="{B334655F-147A-DCE0-7432-281D6F71C24D}"/>
               </a:ext>
             </a:extLst>
           </p:cNvPr>
@@ -3754,7 +3754,7 @@
           <p:cNvPr id="5" name="テキスト ボックス 4">
             <a:extLst>
               <a:ext uri="{FF2B5EF4-FFF2-40B4-BE49-F238E27FC236}">
-                <a16:creationId xmlns:a16="http://schemas.microsoft.com/office/drawing/2014/main" id="{E09D0509-6938-300D-9E3D-A2B1324587C0}"/>
+                <a16:creationId xmlns:a16="http://schemas.microsoft.com/office/drawing/2014/main" id="{96981D2B-E684-ECE3-4ADA-ACFC10A67AB4}"/>
               </a:ext>
             </a:extLst>
           </p:cNvPr>
@@ -3801,7 +3801,7 @@
             <a:hlinkClick r:id="" action="ppaction://media"/>
             <a:extLst>
               <a:ext uri="{FF2B5EF4-FFF2-40B4-BE49-F238E27FC236}">
-                <a16:creationId xmlns:a16="http://schemas.microsoft.com/office/drawing/2014/main" id="{D17A0FD5-4C41-F487-D5CB-25DE7D9F21C8}"/>
+                <a16:creationId xmlns:a16="http://schemas.microsoft.com/office/drawing/2014/main" id="{DF5D3C93-F548-61C1-D20D-2765E687969F}"/>
               </a:ext>
             </a:extLst>
           </p:cNvPr>
@@ -3836,7 +3836,7 @@
     </p:spTree>
     <p:extLst>
       <p:ext uri="{BB962C8B-B14F-4D97-AF65-F5344CB8AC3E}">
-        <p14:creationId xmlns:p14="http://schemas.microsoft.com/office/powerpoint/2010/main" val="1746443071"/>
+        <p14:creationId xmlns:p14="http://schemas.microsoft.com/office/powerpoint/2010/main" val="2363774436"/>
       </p:ext>
     </p:extLst>
   </p:cSld>
@@ -3960,7 +3960,7 @@
           <p:cNvPr id="2" name="テキスト ボックス 1">
             <a:extLst>
               <a:ext uri="{FF2B5EF4-FFF2-40B4-BE49-F238E27FC236}">
-                <a16:creationId xmlns:a16="http://schemas.microsoft.com/office/drawing/2014/main" id="{5459CD54-3E39-9F0E-F3CD-841CC728D6DE}"/>
+                <a16:creationId xmlns:a16="http://schemas.microsoft.com/office/drawing/2014/main" id="{5E6A6BB8-4713-E4E9-B0F2-B82D9101BE61}"/>
               </a:ext>
             </a:extLst>
           </p:cNvPr>
@@ -4006,7 +4006,7 @@
           <p:cNvPr id="3" name="テキスト ボックス 2">
             <a:extLst>
               <a:ext uri="{FF2B5EF4-FFF2-40B4-BE49-F238E27FC236}">
-                <a16:creationId xmlns:a16="http://schemas.microsoft.com/office/drawing/2014/main" id="{69C8B099-0B9B-1F58-F7F1-795229A98458}"/>
+                <a16:creationId xmlns:a16="http://schemas.microsoft.com/office/drawing/2014/main" id="{2984EC9E-392B-2B70-B7DE-D502DBDC7854}"/>
               </a:ext>
             </a:extLst>
           </p:cNvPr>
@@ -4046,7 +4046,7 @@
           <p:cNvPr id="4" name="テキスト ボックス 3">
             <a:extLst>
               <a:ext uri="{FF2B5EF4-FFF2-40B4-BE49-F238E27FC236}">
-                <a16:creationId xmlns:a16="http://schemas.microsoft.com/office/drawing/2014/main" id="{3BC7EC65-9C45-2402-4E50-21B7C15EE5E7}"/>
+                <a16:creationId xmlns:a16="http://schemas.microsoft.com/office/drawing/2014/main" id="{5821B786-853C-46E2-9848-91605996CE5B}"/>
               </a:ext>
             </a:extLst>
           </p:cNvPr>
@@ -4113,7 +4113,7 @@
           <p:cNvPr id="5" name="テキスト ボックス 4">
             <a:extLst>
               <a:ext uri="{FF2B5EF4-FFF2-40B4-BE49-F238E27FC236}">
-                <a16:creationId xmlns:a16="http://schemas.microsoft.com/office/drawing/2014/main" id="{0756423F-E4EC-CB14-1868-E6ACD6D38ACA}"/>
+                <a16:creationId xmlns:a16="http://schemas.microsoft.com/office/drawing/2014/main" id="{EDF8106D-4F1A-7DD1-7B9D-6EC191074C66}"/>
               </a:ext>
             </a:extLst>
           </p:cNvPr>
@@ -4160,7 +4160,7 @@
             <a:hlinkClick r:id="" action="ppaction://media"/>
             <a:extLst>
               <a:ext uri="{FF2B5EF4-FFF2-40B4-BE49-F238E27FC236}">
-                <a16:creationId xmlns:a16="http://schemas.microsoft.com/office/drawing/2014/main" id="{65408436-4867-66C9-3424-D65194830747}"/>
+                <a16:creationId xmlns:a16="http://schemas.microsoft.com/office/drawing/2014/main" id="{36546329-310C-3DCA-9E74-00FD4475B0D7}"/>
               </a:ext>
             </a:extLst>
           </p:cNvPr>
@@ -4195,7 +4195,7 @@
     </p:spTree>
     <p:extLst>
       <p:ext uri="{BB962C8B-B14F-4D97-AF65-F5344CB8AC3E}">
-        <p14:creationId xmlns:p14="http://schemas.microsoft.com/office/powerpoint/2010/main" val="2013460747"/>
+        <p14:creationId xmlns:p14="http://schemas.microsoft.com/office/powerpoint/2010/main" val="651066691"/>
       </p:ext>
     </p:extLst>
   </p:cSld>
@@ -4319,7 +4319,7 @@
           <p:cNvPr id="2" name="テキスト ボックス 1">
             <a:extLst>
               <a:ext uri="{FF2B5EF4-FFF2-40B4-BE49-F238E27FC236}">
-                <a16:creationId xmlns:a16="http://schemas.microsoft.com/office/drawing/2014/main" id="{7CDC7EDF-AD09-1015-E83B-4C8E96A21BCE}"/>
+                <a16:creationId xmlns:a16="http://schemas.microsoft.com/office/drawing/2014/main" id="{0352A0CF-4BB6-C40F-7A4B-C6E0DF3AD001}"/>
               </a:ext>
             </a:extLst>
           </p:cNvPr>
@@ -4365,7 +4365,7 @@
           <p:cNvPr id="3" name="テキスト ボックス 2">
             <a:extLst>
               <a:ext uri="{FF2B5EF4-FFF2-40B4-BE49-F238E27FC236}">
-                <a16:creationId xmlns:a16="http://schemas.microsoft.com/office/drawing/2014/main" id="{809D7F70-BF69-03F3-7CBF-148C1112B4D7}"/>
+                <a16:creationId xmlns:a16="http://schemas.microsoft.com/office/drawing/2014/main" id="{AE6472A3-ECC2-A178-CBFF-9617150E9B63}"/>
               </a:ext>
             </a:extLst>
           </p:cNvPr>
@@ -4405,7 +4405,7 @@
           <p:cNvPr id="4" name="テキスト ボックス 3">
             <a:extLst>
               <a:ext uri="{FF2B5EF4-FFF2-40B4-BE49-F238E27FC236}">
-                <a16:creationId xmlns:a16="http://schemas.microsoft.com/office/drawing/2014/main" id="{1A5933A3-EF2A-515C-8E2B-F55CB48AE5E7}"/>
+                <a16:creationId xmlns:a16="http://schemas.microsoft.com/office/drawing/2014/main" id="{7B170081-7166-7CD7-2763-EBCF27D29D2D}"/>
               </a:ext>
             </a:extLst>
           </p:cNvPr>
@@ -4500,7 +4500,7 @@
           <p:cNvPr id="5" name="テキスト ボックス 4">
             <a:extLst>
               <a:ext uri="{FF2B5EF4-FFF2-40B4-BE49-F238E27FC236}">
-                <a16:creationId xmlns:a16="http://schemas.microsoft.com/office/drawing/2014/main" id="{CAF21ED6-E06A-7475-9C04-B990DBB4970E}"/>
+                <a16:creationId xmlns:a16="http://schemas.microsoft.com/office/drawing/2014/main" id="{40EDA9B3-5ADD-E32D-C6E2-83811EB371A9}"/>
               </a:ext>
             </a:extLst>
           </p:cNvPr>
@@ -4547,7 +4547,7 @@
             <a:hlinkClick r:id="" action="ppaction://media"/>
             <a:extLst>
               <a:ext uri="{FF2B5EF4-FFF2-40B4-BE49-F238E27FC236}">
-                <a16:creationId xmlns:a16="http://schemas.microsoft.com/office/drawing/2014/main" id="{6C575F83-D165-C758-749D-BAE13B348550}"/>
+                <a16:creationId xmlns:a16="http://schemas.microsoft.com/office/drawing/2014/main" id="{963C1401-908B-AA50-747F-A636AEC6832F}"/>
               </a:ext>
             </a:extLst>
           </p:cNvPr>
@@ -4582,7 +4582,7 @@
     </p:spTree>
     <p:extLst>
       <p:ext uri="{BB962C8B-B14F-4D97-AF65-F5344CB8AC3E}">
-        <p14:creationId xmlns:p14="http://schemas.microsoft.com/office/powerpoint/2010/main" val="98612858"/>
+        <p14:creationId xmlns:p14="http://schemas.microsoft.com/office/powerpoint/2010/main" val="2494018665"/>
       </p:ext>
     </p:extLst>
   </p:cSld>
@@ -4706,7 +4706,7 @@
           <p:cNvPr id="2" name="テキスト ボックス 1">
             <a:extLst>
               <a:ext uri="{FF2B5EF4-FFF2-40B4-BE49-F238E27FC236}">
-                <a16:creationId xmlns:a16="http://schemas.microsoft.com/office/drawing/2014/main" id="{EB9D07D2-5C7D-2050-EB3A-92EDC78CC56C}"/>
+                <a16:creationId xmlns:a16="http://schemas.microsoft.com/office/drawing/2014/main" id="{ACAE4CF1-72D3-C410-14D3-CAD332E3B66C}"/>
               </a:ext>
             </a:extLst>
           </p:cNvPr>
@@ -4752,7 +4752,7 @@
           <p:cNvPr id="3" name="テキスト ボックス 2">
             <a:extLst>
               <a:ext uri="{FF2B5EF4-FFF2-40B4-BE49-F238E27FC236}">
-                <a16:creationId xmlns:a16="http://schemas.microsoft.com/office/drawing/2014/main" id="{B1AC173E-16F2-2D06-0A92-5E4EE8833A32}"/>
+                <a16:creationId xmlns:a16="http://schemas.microsoft.com/office/drawing/2014/main" id="{3D03F979-94E2-E7AB-8512-30F0A73A103B}"/>
               </a:ext>
             </a:extLst>
           </p:cNvPr>
@@ -4792,7 +4792,7 @@
           <p:cNvPr id="4" name="テキスト ボックス 3">
             <a:extLst>
               <a:ext uri="{FF2B5EF4-FFF2-40B4-BE49-F238E27FC236}">
-                <a16:creationId xmlns:a16="http://schemas.microsoft.com/office/drawing/2014/main" id="{1EBE43DC-5C8E-7ECA-5C2B-2EAB646F276B}"/>
+                <a16:creationId xmlns:a16="http://schemas.microsoft.com/office/drawing/2014/main" id="{E9289952-D59C-3CE9-1A20-C2493240531F}"/>
               </a:ext>
             </a:extLst>
           </p:cNvPr>
@@ -4902,7 +4902,7 @@
           <p:cNvPr id="5" name="テキスト ボックス 4">
             <a:extLst>
               <a:ext uri="{FF2B5EF4-FFF2-40B4-BE49-F238E27FC236}">
-                <a16:creationId xmlns:a16="http://schemas.microsoft.com/office/drawing/2014/main" id="{0DDF5404-CA13-17CE-EB80-D94E188F9132}"/>
+                <a16:creationId xmlns:a16="http://schemas.microsoft.com/office/drawing/2014/main" id="{2921BA40-2FCA-460E-C532-EB1E8010D204}"/>
               </a:ext>
             </a:extLst>
           </p:cNvPr>
@@ -4949,7 +4949,7 @@
             <a:hlinkClick r:id="" action="ppaction://media"/>
             <a:extLst>
               <a:ext uri="{FF2B5EF4-FFF2-40B4-BE49-F238E27FC236}">
-                <a16:creationId xmlns:a16="http://schemas.microsoft.com/office/drawing/2014/main" id="{06978909-076A-F310-45E7-A414E36B6881}"/>
+                <a16:creationId xmlns:a16="http://schemas.microsoft.com/office/drawing/2014/main" id="{BE7C731C-7719-111D-7752-FA7BB1818F86}"/>
               </a:ext>
             </a:extLst>
           </p:cNvPr>
@@ -4984,7 +4984,7 @@
     </p:spTree>
     <p:extLst>
       <p:ext uri="{BB962C8B-B14F-4D97-AF65-F5344CB8AC3E}">
-        <p14:creationId xmlns:p14="http://schemas.microsoft.com/office/powerpoint/2010/main" val="1933855906"/>
+        <p14:creationId xmlns:p14="http://schemas.microsoft.com/office/powerpoint/2010/main" val="373712743"/>
       </p:ext>
     </p:extLst>
   </p:cSld>
@@ -5108,7 +5108,7 @@
           <p:cNvPr id="2" name="テキスト ボックス 1">
             <a:extLst>
               <a:ext uri="{FF2B5EF4-FFF2-40B4-BE49-F238E27FC236}">
-                <a16:creationId xmlns:a16="http://schemas.microsoft.com/office/drawing/2014/main" id="{5C4EE4A7-97FE-B259-3DF5-1AA63C46AE71}"/>
+                <a16:creationId xmlns:a16="http://schemas.microsoft.com/office/drawing/2014/main" id="{B8D4ED1C-1834-0AF2-2F21-425B71EE0B31}"/>
               </a:ext>
             </a:extLst>
           </p:cNvPr>
@@ -5154,7 +5154,7 @@
           <p:cNvPr id="3" name="テキスト ボックス 2">
             <a:extLst>
               <a:ext uri="{FF2B5EF4-FFF2-40B4-BE49-F238E27FC236}">
-                <a16:creationId xmlns:a16="http://schemas.microsoft.com/office/drawing/2014/main" id="{163394F9-9DEC-C6E0-C30C-32F39BD14A73}"/>
+                <a16:creationId xmlns:a16="http://schemas.microsoft.com/office/drawing/2014/main" id="{E01D2490-0BB6-082D-192C-DD7628A73535}"/>
               </a:ext>
             </a:extLst>
           </p:cNvPr>
@@ -5194,7 +5194,7 @@
           <p:cNvPr id="4" name="テキスト ボックス 3">
             <a:extLst>
               <a:ext uri="{FF2B5EF4-FFF2-40B4-BE49-F238E27FC236}">
-                <a16:creationId xmlns:a16="http://schemas.microsoft.com/office/drawing/2014/main" id="{32815EC8-1991-DEE6-CFAE-43C55F9F27B7}"/>
+                <a16:creationId xmlns:a16="http://schemas.microsoft.com/office/drawing/2014/main" id="{716DB68F-D062-E4DE-44DC-D08DB62136AB}"/>
               </a:ext>
             </a:extLst>
           </p:cNvPr>
@@ -5218,20 +5218,14 @@
           <a:lstStyle/>
           <a:p>
             <a:r>
-              <a:rPr kumimoji="1" lang="en-US" altLang="ja-JP" sz="2000">
+              <a:rPr kumimoji="1" lang="ja-JP" altLang="en-US" sz="2000">
                 <a:solidFill>
                   <a:srgbClr val="333333"/>
                 </a:solidFill>
                 <a:latin typeface="Arial" panose="020B0604020202020204" pitchFamily="34" charset="0"/>
               </a:rPr>
-              <a:t>Set rccourse domain</a:t>
-            </a:r>
-            <a:endParaRPr kumimoji="1" lang="ja-JP" altLang="en-US" sz="2000">
-              <a:solidFill>
-                <a:srgbClr val="333333"/>
-              </a:solidFill>
-              <a:latin typeface="Arial" panose="020B0604020202020204" pitchFamily="34" charset="0"/>
-            </a:endParaRPr>
+              <a:t>直近のコミットでは、実装の見直しと継続的な改善が行われました。</a:t>
+            </a:r>
           </a:p>
         </p:txBody>
       </p:sp>
@@ -5240,7 +5234,7 @@
           <p:cNvPr id="5" name="テキスト ボックス 4">
             <a:extLst>
               <a:ext uri="{FF2B5EF4-FFF2-40B4-BE49-F238E27FC236}">
-                <a16:creationId xmlns:a16="http://schemas.microsoft.com/office/drawing/2014/main" id="{58812EB0-9285-D7DC-0778-8BE0379A669A}"/>
+                <a16:creationId xmlns:a16="http://schemas.microsoft.com/office/drawing/2014/main" id="{42690928-6F89-E492-ED28-B73FB5966EAF}"/>
               </a:ext>
             </a:extLst>
           </p:cNvPr>
@@ -5287,7 +5281,7 @@
             <a:hlinkClick r:id="" action="ppaction://media"/>
             <a:extLst>
               <a:ext uri="{FF2B5EF4-FFF2-40B4-BE49-F238E27FC236}">
-                <a16:creationId xmlns:a16="http://schemas.microsoft.com/office/drawing/2014/main" id="{5FD8262F-BA92-9646-0463-585AC4785B42}"/>
+                <a16:creationId xmlns:a16="http://schemas.microsoft.com/office/drawing/2014/main" id="{EBEE4174-57DD-BE9E-B013-B77B89FE177F}"/>
               </a:ext>
             </a:extLst>
           </p:cNvPr>
@@ -5322,7 +5316,7 @@
     </p:spTree>
     <p:extLst>
       <p:ext uri="{BB962C8B-B14F-4D97-AF65-F5344CB8AC3E}">
-        <p14:creationId xmlns:p14="http://schemas.microsoft.com/office/powerpoint/2010/main" val="3586797386"/>
+        <p14:creationId xmlns:p14="http://schemas.microsoft.com/office/powerpoint/2010/main" val="4012233432"/>
       </p:ext>
     </p:extLst>
   </p:cSld>
@@ -5331,10 +5325,10 @@
   </p:clrMapOvr>
   <mc:AlternateContent xmlns:mc="http://schemas.openxmlformats.org/markup-compatibility/2006">
     <mc:Choice xmlns:p14="http://schemas.microsoft.com/office/powerpoint/2010/main" Requires="p14">
-      <p:transition spd="slow" p14:dur="2000" advTm="6000"/>
+      <p:transition spd="slow" p14:dur="2000" advTm="7000"/>
     </mc:Choice>
     <mc:Fallback>
-      <p:transition spd="slow" advTm="6000"/>
+      <p:transition spd="slow" advTm="7000"/>
     </mc:Fallback>
   </mc:AlternateContent>
   <p:timing>
@@ -5365,7 +5359,7 @@
                                   <p:childTnLst>
                                     <p:cmd type="call" cmd="playFrom(0.0)">
                                       <p:cBhvr>
-                                        <p:cTn id="6" dur="5742" fill="hold"/>
+                                        <p:cTn id="6" dur="6076" fill="hold"/>
                                         <p:tgtEl>
                                           <p:spTgt spid="6"/>
                                         </p:tgtEl>
@@ -5446,7 +5440,7 @@
           <p:cNvPr id="2" name="テキスト ボックス 1">
             <a:extLst>
               <a:ext uri="{FF2B5EF4-FFF2-40B4-BE49-F238E27FC236}">
-                <a16:creationId xmlns:a16="http://schemas.microsoft.com/office/drawing/2014/main" id="{D2A9D8AA-7D68-3B5F-4007-9B11EFF786CF}"/>
+                <a16:creationId xmlns:a16="http://schemas.microsoft.com/office/drawing/2014/main" id="{27BFC87D-6BDA-4DD1-9783-905A46AEB269}"/>
               </a:ext>
             </a:extLst>
           </p:cNvPr>
@@ -5492,7 +5486,7 @@
           <p:cNvPr id="3" name="テキスト ボックス 2">
             <a:extLst>
               <a:ext uri="{FF2B5EF4-FFF2-40B4-BE49-F238E27FC236}">
-                <a16:creationId xmlns:a16="http://schemas.microsoft.com/office/drawing/2014/main" id="{9E03225F-CD8C-38AF-ACDC-54317339EBA2}"/>
+                <a16:creationId xmlns:a16="http://schemas.microsoft.com/office/drawing/2014/main" id="{DB39AA14-895B-CC65-B489-4AE9EAA7CC71}"/>
               </a:ext>
             </a:extLst>
           </p:cNvPr>
@@ -5532,7 +5526,7 @@
           <p:cNvPr id="4" name="テキスト ボックス 3">
             <a:extLst>
               <a:ext uri="{FF2B5EF4-FFF2-40B4-BE49-F238E27FC236}">
-                <a16:creationId xmlns:a16="http://schemas.microsoft.com/office/drawing/2014/main" id="{55483964-F0CC-DFA6-3627-38529D6D1BD9}"/>
+                <a16:creationId xmlns:a16="http://schemas.microsoft.com/office/drawing/2014/main" id="{50DF9160-82F3-CB2F-CE53-50841295AD5D}"/>
               </a:ext>
             </a:extLst>
           </p:cNvPr>
@@ -5597,7 +5591,7 @@
           <p:cNvPr id="5" name="テキスト ボックス 4">
             <a:extLst>
               <a:ext uri="{FF2B5EF4-FFF2-40B4-BE49-F238E27FC236}">
-                <a16:creationId xmlns:a16="http://schemas.microsoft.com/office/drawing/2014/main" id="{F7A4999A-303A-ACA7-4BEC-B991A7363D7F}"/>
+                <a16:creationId xmlns:a16="http://schemas.microsoft.com/office/drawing/2014/main" id="{D6A53C63-ABEE-9C6B-5F4F-EA492E303ABD}"/>
               </a:ext>
             </a:extLst>
           </p:cNvPr>
@@ -5644,7 +5638,7 @@
             <a:hlinkClick r:id="" action="ppaction://media"/>
             <a:extLst>
               <a:ext uri="{FF2B5EF4-FFF2-40B4-BE49-F238E27FC236}">
-                <a16:creationId xmlns:a16="http://schemas.microsoft.com/office/drawing/2014/main" id="{76564ED1-BFF3-32CD-9124-7E2B0903E63B}"/>
+                <a16:creationId xmlns:a16="http://schemas.microsoft.com/office/drawing/2014/main" id="{106C8F49-E43E-0108-9C0F-F22C79E961B6}"/>
               </a:ext>
             </a:extLst>
           </p:cNvPr>
@@ -5679,7 +5673,7 @@
     </p:spTree>
     <p:extLst>
       <p:ext uri="{BB962C8B-B14F-4D97-AF65-F5344CB8AC3E}">
-        <p14:creationId xmlns:p14="http://schemas.microsoft.com/office/powerpoint/2010/main" val="3963304807"/>
+        <p14:creationId xmlns:p14="http://schemas.microsoft.com/office/powerpoint/2010/main" val="3305475612"/>
       </p:ext>
     </p:extLst>
   </p:cSld>
